--- a/presentation/team_11_presentation.pptx
+++ b/presentation/team_11_presentation.pptx
@@ -5,15 +5,15 @@
     <p:sldMasterId id="2147483648" r:id="rId1"/>
   </p:sldMasterIdLst>
   <p:sldIdLst>
-    <p:sldId id="256" r:id="rId7"/>
-    <p:sldId id="257" r:id="rId8"/>
-    <p:sldId id="258" r:id="rId9"/>
-    <p:sldId id="259" r:id="rId10"/>
-    <p:sldId id="260" r:id="rId11"/>
-    <p:sldId id="261" r:id="rId12"/>
-    <p:sldId id="262" r:id="rId13"/>
+    <p:sldId id="256" r:id="rId2"/>
+    <p:sldId id="257" r:id="rId3"/>
+    <p:sldId id="258" r:id="rId4"/>
+    <p:sldId id="259" r:id="rId5"/>
+    <p:sldId id="260" r:id="rId6"/>
+    <p:sldId id="261" r:id="rId7"/>
+    <p:sldId id="262" r:id="rId8"/>
   </p:sldIdLst>
-  <p:sldSz cx="12191695" cy="6858000" type="screen4x3"/>
+  <p:sldSz cx="12192000" cy="6858000"/>
   <p:notesSz cx="6858000" cy="9144000"/>
   <p:defaultTextStyle>
     <a:defPPr>
@@ -294,7 +294,7 @@
           <a:p>
             <a:fld id="{5BCAD085-E8A6-8845-BD4E-CB4CCA059FC4}" type="datetimeFigureOut">
               <a:rPr lang="en-US" smtClean="0"/>
-              <a:t>1/27/13</a:t>
+              <a:t>10/6/2026</a:t>
             </a:fld>
             <a:endParaRPr lang="en-US"/>
           </a:p>
@@ -464,7 +464,7 @@
           <a:p>
             <a:fld id="{5BCAD085-E8A6-8845-BD4E-CB4CCA059FC4}" type="datetimeFigureOut">
               <a:rPr lang="en-US" smtClean="0"/>
-              <a:t>1/27/13</a:t>
+              <a:t>10/6/2026</a:t>
             </a:fld>
             <a:endParaRPr lang="en-US"/>
           </a:p>
@@ -644,7 +644,7 @@
           <a:p>
             <a:fld id="{5BCAD085-E8A6-8845-BD4E-CB4CCA059FC4}" type="datetimeFigureOut">
               <a:rPr lang="en-US" smtClean="0"/>
-              <a:t>1/27/13</a:t>
+              <a:t>10/6/2026</a:t>
             </a:fld>
             <a:endParaRPr lang="en-US"/>
           </a:p>
@@ -814,7 +814,7 @@
           <a:p>
             <a:fld id="{5BCAD085-E8A6-8845-BD4E-CB4CCA059FC4}" type="datetimeFigureOut">
               <a:rPr lang="en-US" smtClean="0"/>
-              <a:t>1/27/13</a:t>
+              <a:t>10/6/2026</a:t>
             </a:fld>
             <a:endParaRPr lang="en-US"/>
           </a:p>
@@ -1060,7 +1060,7 @@
           <a:p>
             <a:fld id="{5BCAD085-E8A6-8845-BD4E-CB4CCA059FC4}" type="datetimeFigureOut">
               <a:rPr lang="en-US" smtClean="0"/>
-              <a:t>1/27/13</a:t>
+              <a:t>10/6/2026</a:t>
             </a:fld>
             <a:endParaRPr lang="en-US"/>
           </a:p>
@@ -1348,7 +1348,7 @@
           <a:p>
             <a:fld id="{5BCAD085-E8A6-8845-BD4E-CB4CCA059FC4}" type="datetimeFigureOut">
               <a:rPr lang="en-US" smtClean="0"/>
-              <a:t>1/27/13</a:t>
+              <a:t>10/6/2026</a:t>
             </a:fld>
             <a:endParaRPr lang="en-US"/>
           </a:p>
@@ -1770,7 +1770,7 @@
           <a:p>
             <a:fld id="{5BCAD085-E8A6-8845-BD4E-CB4CCA059FC4}" type="datetimeFigureOut">
               <a:rPr lang="en-US" smtClean="0"/>
-              <a:t>1/27/13</a:t>
+              <a:t>10/6/2026</a:t>
             </a:fld>
             <a:endParaRPr lang="en-US"/>
           </a:p>
@@ -1888,7 +1888,7 @@
           <a:p>
             <a:fld id="{5BCAD085-E8A6-8845-BD4E-CB4CCA059FC4}" type="datetimeFigureOut">
               <a:rPr lang="en-US" smtClean="0"/>
-              <a:t>1/27/13</a:t>
+              <a:t>10/6/2026</a:t>
             </a:fld>
             <a:endParaRPr lang="en-US"/>
           </a:p>
@@ -1983,7 +1983,7 @@
           <a:p>
             <a:fld id="{5BCAD085-E8A6-8845-BD4E-CB4CCA059FC4}" type="datetimeFigureOut">
               <a:rPr lang="en-US" smtClean="0"/>
-              <a:t>1/27/13</a:t>
+              <a:t>10/6/2026</a:t>
             </a:fld>
             <a:endParaRPr lang="en-US"/>
           </a:p>
@@ -2260,7 +2260,7 @@
           <a:p>
             <a:fld id="{5BCAD085-E8A6-8845-BD4E-CB4CCA059FC4}" type="datetimeFigureOut">
               <a:rPr lang="en-US" smtClean="0"/>
-              <a:t>1/27/13</a:t>
+              <a:t>10/6/2026</a:t>
             </a:fld>
             <a:endParaRPr lang="en-US"/>
           </a:p>
@@ -2513,7 +2513,7 @@
           <a:p>
             <a:fld id="{5BCAD085-E8A6-8845-BD4E-CB4CCA059FC4}" type="datetimeFigureOut">
               <a:rPr lang="en-US" smtClean="0"/>
-              <a:t>1/27/13</a:t>
+              <a:t>10/6/2026</a:t>
             </a:fld>
             <a:endParaRPr lang="en-US"/>
           </a:p>
@@ -2726,7 +2726,7 @@
           <a:p>
             <a:fld id="{5BCAD085-E8A6-8845-BD4E-CB4CCA059FC4}" type="datetimeFigureOut">
               <a:rPr lang="en-US" smtClean="0"/>
-              <a:t>1/27/13</a:t>
+              <a:t>10/6/2026</a:t>
             </a:fld>
             <a:endParaRPr lang="en-US"/>
           </a:p>
@@ -3085,7 +3085,7 @@
 </file>
 
 <file path=ppt/slides/slide1.xml><?xml version="1.0" encoding="utf-8"?>
-<p:sld xmlns:a="http://schemas.openxmlformats.org/drawingml/2006/main" xmlns:p="http://schemas.openxmlformats.org/presentationml/2006/main" xmlns:r="http://schemas.openxmlformats.org/officeDocument/2006/relationships">
+<p:sld xmlns:a="http://schemas.openxmlformats.org/drawingml/2006/main" xmlns:r="http://schemas.openxmlformats.org/officeDocument/2006/relationships" xmlns:p="http://schemas.openxmlformats.org/presentationml/2006/main">
   <p:cSld>
     <p:bg>
       <p:bgPr>
@@ -3101,7 +3101,14 @@
         <p:cNvGrpSpPr/>
         <p:nvPr/>
       </p:nvGrpSpPr>
-      <p:grpSpPr/>
+      <p:grpSpPr>
+        <a:xfrm>
+          <a:off x="0" y="0"/>
+          <a:ext cx="0" cy="0"/>
+          <a:chOff x="0" y="0"/>
+          <a:chExt cx="0" cy="0"/>
+        </a:xfrm>
+      </p:grpSpPr>
       <p:sp>
         <p:nvSpPr>
           <p:cNvPr id="2" name="Rectangle 1"/>
@@ -3142,6 +3149,7 @@
           <a:lstStyle/>
           <a:p>
             <a:pPr algn="ctr"/>
+            <a:endParaRPr/>
           </a:p>
         </p:txBody>
       </p:sp>
@@ -3185,6 +3193,7 @@
           <a:lstStyle/>
           <a:p>
             <a:pPr algn="ctr"/>
+            <a:endParaRPr/>
           </a:p>
         </p:txBody>
       </p:sp>
@@ -3212,7 +3221,7 @@
           <a:p>
             <a:pPr algn="ctr"/>
             <a:r>
-              <a:rPr b="1" sz="2800">
+              <a:rPr sz="2800" b="1">
                 <a:solidFill>
                   <a:srgbClr val="FFFFFF"/>
                 </a:solidFill>
@@ -3346,6 +3355,7 @@
           <a:lstStyle/>
           <a:p>
             <a:pPr algn="ctr"/>
+            <a:endParaRPr/>
           </a:p>
         </p:txBody>
       </p:sp>
@@ -3373,7 +3383,7 @@
           <a:p>
             <a:pPr algn="ctr"/>
             <a:r>
-              <a:rPr b="1" sz="1200">
+              <a:rPr sz="1200" b="1">
                 <a:solidFill>
                   <a:srgbClr val="2E7D5C"/>
                 </a:solidFill>
@@ -3425,6 +3435,7 @@
           <a:lstStyle/>
           <a:p>
             <a:pPr algn="ctr"/>
+            <a:endParaRPr/>
           </a:p>
         </p:txBody>
       </p:sp>
@@ -3452,7 +3463,7 @@
           <a:p>
             <a:pPr algn="ctr"/>
             <a:r>
-              <a:rPr b="1" sz="1200">
+              <a:rPr sz="1200" b="1">
                 <a:solidFill>
                   <a:srgbClr val="2E7D5C"/>
                 </a:solidFill>
@@ -3504,6 +3515,7 @@
           <a:lstStyle/>
           <a:p>
             <a:pPr algn="ctr"/>
+            <a:endParaRPr/>
           </a:p>
         </p:txBody>
       </p:sp>
@@ -3531,7 +3543,7 @@
           <a:p>
             <a:pPr algn="ctr"/>
             <a:r>
-              <a:rPr b="1" sz="1200">
+              <a:rPr sz="1200" b="1">
                 <a:solidFill>
                   <a:srgbClr val="2E7D5C"/>
                 </a:solidFill>
@@ -3583,6 +3595,7 @@
           <a:lstStyle/>
           <a:p>
             <a:pPr algn="ctr"/>
+            <a:endParaRPr/>
           </a:p>
         </p:txBody>
       </p:sp>
@@ -3610,7 +3623,7 @@
           <a:p>
             <a:pPr algn="l"/>
             <a:r>
-              <a:rPr b="1" sz="1400">
+              <a:rPr sz="1400" b="1">
                 <a:solidFill>
                   <a:srgbClr val="0C2034"/>
                 </a:solidFill>
@@ -3662,6 +3675,7 @@
           <a:lstStyle/>
           <a:p>
             <a:pPr algn="ctr"/>
+            <a:endParaRPr/>
           </a:p>
         </p:txBody>
       </p:sp>
@@ -3688,7 +3702,7 @@
           <a:lstStyle/>
           <a:p>
             <a:r>
-              <a:rPr b="1" sz="1000">
+              <a:rPr sz="1000" b="1">
                 <a:solidFill>
                   <a:srgbClr val="0C2034"/>
                 </a:solidFill>
@@ -3721,7 +3735,7 @@
           <a:lstStyle/>
           <a:p>
             <a:r>
-              <a:rPr b="1" sz="1600">
+              <a:rPr sz="1600" b="1">
                 <a:solidFill>
                   <a:srgbClr val="2E7D5C"/>
                 </a:solidFill>
@@ -3773,6 +3787,7 @@
           <a:lstStyle/>
           <a:p>
             <a:pPr algn="ctr"/>
+            <a:endParaRPr/>
           </a:p>
         </p:txBody>
       </p:sp>
@@ -3799,7 +3814,7 @@
           <a:lstStyle/>
           <a:p>
             <a:r>
-              <a:rPr b="1" sz="1000">
+              <a:rPr sz="1000" b="1">
                 <a:solidFill>
                   <a:srgbClr val="0C2034"/>
                 </a:solidFill>
@@ -3832,7 +3847,7 @@
           <a:lstStyle/>
           <a:p>
             <a:r>
-              <a:rPr b="1" sz="1600">
+              <a:rPr sz="1600" b="1">
                 <a:solidFill>
                   <a:srgbClr val="2E7D5C"/>
                 </a:solidFill>
@@ -3884,6 +3899,7 @@
           <a:lstStyle/>
           <a:p>
             <a:pPr algn="ctr"/>
+            <a:endParaRPr/>
           </a:p>
         </p:txBody>
       </p:sp>
@@ -3910,7 +3926,7 @@
           <a:lstStyle/>
           <a:p>
             <a:r>
-              <a:rPr b="1" sz="1000">
+              <a:rPr sz="1000" b="1">
                 <a:solidFill>
                   <a:srgbClr val="0C2034"/>
                 </a:solidFill>
@@ -3943,7 +3959,7 @@
           <a:lstStyle/>
           <a:p>
             <a:r>
-              <a:rPr b="1" sz="1600">
+              <a:rPr sz="1600" b="1">
                 <a:solidFill>
                   <a:srgbClr val="2E7D5C"/>
                 </a:solidFill>
@@ -3962,7 +3978,7 @@
 </file>
 
 <file path=ppt/slides/slide2.xml><?xml version="1.0" encoding="utf-8"?>
-<p:sld xmlns:a="http://schemas.openxmlformats.org/drawingml/2006/main" xmlns:p="http://schemas.openxmlformats.org/presentationml/2006/main" xmlns:r="http://schemas.openxmlformats.org/officeDocument/2006/relationships">
+<p:sld xmlns:a="http://schemas.openxmlformats.org/drawingml/2006/main" xmlns:r="http://schemas.openxmlformats.org/officeDocument/2006/relationships" xmlns:p="http://schemas.openxmlformats.org/presentationml/2006/main">
   <p:cSld>
     <p:bg>
       <p:bgPr>
@@ -3978,7 +3994,14 @@
         <p:cNvGrpSpPr/>
         <p:nvPr/>
       </p:nvGrpSpPr>
-      <p:grpSpPr/>
+      <p:grpSpPr>
+        <a:xfrm>
+          <a:off x="0" y="0"/>
+          <a:ext cx="0" cy="0"/>
+          <a:chOff x="0" y="0"/>
+          <a:chExt cx="0" cy="0"/>
+        </a:xfrm>
+      </p:grpSpPr>
       <p:sp>
         <p:nvSpPr>
           <p:cNvPr id="2" name="TextBox 1"/>
@@ -3988,7 +4011,7 @@
         <p:spPr>
           <a:xfrm>
             <a:off x="594360" y="411480"/>
-            <a:ext cx="8686800" cy="731520"/>
+            <a:ext cx="8686800" cy="492443"/>
           </a:xfrm>
           <a:prstGeom prst="rect">
             <a:avLst/>
@@ -4003,10 +4026,7 @@
           <a:p>
             <a:pPr algn="l"/>
             <a:r>
-              <a:rPr sz="2600" b="1">
-                <a:solidFill>
-                  <a:srgbClr val="FFFFFF"/>
-                </a:solidFill>
+              <a:rPr sz="2600" b="1" dirty="0">
                 <a:latin typeface="Aptos"/>
               </a:rPr>
               <a:t>Project objective</a:t>
@@ -4023,7 +4043,7 @@
         <p:spPr>
           <a:xfrm>
             <a:off x="621792" y="987552"/>
-            <a:ext cx="7772400" cy="457200"/>
+            <a:ext cx="4172937" cy="261610"/>
           </a:xfrm>
           <a:prstGeom prst="rect">
             <a:avLst/>
@@ -4038,10 +4058,7 @@
           <a:p>
             <a:pPr algn="l"/>
             <a:r>
-              <a:rPr sz="1100">
-                <a:solidFill>
-                  <a:srgbClr val="FFFFFF"/>
-                </a:solidFill>
+              <a:rPr sz="1100" dirty="0">
                 <a:latin typeface="Aptos"/>
               </a:rPr>
               <a:t>Build a reliable crop yield forecast under competition constraints</a:t>
@@ -4091,6 +4108,7 @@
           <a:lstStyle/>
           <a:p>
             <a:pPr algn="ctr"/>
+            <a:endParaRPr/>
           </a:p>
         </p:txBody>
       </p:sp>
@@ -4118,7 +4136,7 @@
           <a:p>
             <a:pPr algn="l"/>
             <a:r>
-              <a:rPr b="1" sz="1500">
+              <a:rPr sz="1500" b="1">
                 <a:solidFill>
                   <a:srgbClr val="2E7D5C"/>
                 </a:solidFill>
@@ -4258,6 +4276,7 @@
           <a:lstStyle/>
           <a:p>
             <a:pPr algn="ctr"/>
+            <a:endParaRPr/>
           </a:p>
         </p:txBody>
       </p:sp>
@@ -4285,7 +4304,7 @@
           <a:p>
             <a:pPr algn="l"/>
             <a:r>
-              <a:rPr b="1" sz="1500">
+              <a:rPr sz="1500" b="1">
                 <a:solidFill>
                   <a:srgbClr val="215E98"/>
                 </a:solidFill>
@@ -4425,6 +4444,7 @@
           <a:lstStyle/>
           <a:p>
             <a:pPr algn="ctr"/>
+            <a:endParaRPr/>
           </a:p>
         </p:txBody>
       </p:sp>
@@ -4452,7 +4472,7 @@
           <a:p>
             <a:pPr algn="l"/>
             <a:r>
-              <a:rPr b="1" sz="1500">
+              <a:rPr sz="1500" b="1">
                 <a:solidFill>
                   <a:srgbClr val="F3A334"/>
                 </a:solidFill>
@@ -4559,7 +4579,7 @@
 </file>
 
 <file path=ppt/slides/slide3.xml><?xml version="1.0" encoding="utf-8"?>
-<p:sld xmlns:a="http://schemas.openxmlformats.org/drawingml/2006/main" xmlns:p="http://schemas.openxmlformats.org/presentationml/2006/main" xmlns:r="http://schemas.openxmlformats.org/officeDocument/2006/relationships">
+<p:sld xmlns:a="http://schemas.openxmlformats.org/drawingml/2006/main" xmlns:r="http://schemas.openxmlformats.org/officeDocument/2006/relationships" xmlns:p="http://schemas.openxmlformats.org/presentationml/2006/main">
   <p:cSld>
     <p:bg>
       <p:bgPr>
@@ -4575,7 +4595,14 @@
         <p:cNvGrpSpPr/>
         <p:nvPr/>
       </p:nvGrpSpPr>
-      <p:grpSpPr/>
+      <p:grpSpPr>
+        <a:xfrm>
+          <a:off x="0" y="0"/>
+          <a:ext cx="0" cy="0"/>
+          <a:chOff x="0" y="0"/>
+          <a:chExt cx="0" cy="0"/>
+        </a:xfrm>
+      </p:grpSpPr>
       <p:sp>
         <p:nvSpPr>
           <p:cNvPr id="2" name="TextBox 1"/>
@@ -4585,7 +4612,7 @@
         <p:spPr>
           <a:xfrm>
             <a:off x="594360" y="411480"/>
-            <a:ext cx="8686800" cy="731520"/>
+            <a:ext cx="8686800" cy="492443"/>
           </a:xfrm>
           <a:prstGeom prst="rect">
             <a:avLst/>
@@ -4600,10 +4627,7 @@
           <a:p>
             <a:pPr algn="l"/>
             <a:r>
-              <a:rPr sz="2600" b="1">
-                <a:solidFill>
-                  <a:srgbClr val="FFFFFF"/>
-                </a:solidFill>
+              <a:rPr sz="2600" b="1" dirty="0">
                 <a:latin typeface="Aptos"/>
               </a:rPr>
               <a:t>Data and cleaning pipeline</a:t>
@@ -4620,7 +4644,7 @@
         <p:spPr>
           <a:xfrm>
             <a:off x="621792" y="987552"/>
-            <a:ext cx="7772400" cy="457200"/>
+            <a:ext cx="3903633" cy="261610"/>
           </a:xfrm>
           <a:prstGeom prst="rect">
             <a:avLst/>
@@ -4635,10 +4659,7 @@
           <a:p>
             <a:pPr algn="l"/>
             <a:r>
-              <a:rPr sz="1100">
-                <a:solidFill>
-                  <a:srgbClr val="FFFFFF"/>
-                </a:solidFill>
+              <a:rPr sz="1100" dirty="0">
                 <a:latin typeface="Aptos"/>
               </a:rPr>
               <a:t>Traceable preprocessing from raw files to model-ready data</a:t>
@@ -4688,6 +4709,7 @@
           <a:lstStyle/>
           <a:p>
             <a:pPr algn="ctr"/>
+            <a:endParaRPr/>
           </a:p>
         </p:txBody>
       </p:sp>
@@ -4715,7 +4737,7 @@
           <a:p>
             <a:pPr algn="l"/>
             <a:r>
-              <a:rPr b="1" sz="1500">
+              <a:rPr sz="1500" b="1">
                 <a:solidFill>
                   <a:srgbClr val="2E7D5C"/>
                 </a:solidFill>
@@ -4855,6 +4877,7 @@
           <a:lstStyle/>
           <a:p>
             <a:pPr algn="ctr"/>
+            <a:endParaRPr/>
           </a:p>
         </p:txBody>
       </p:sp>
@@ -4882,7 +4905,7 @@
           <a:p>
             <a:pPr algn="l"/>
             <a:r>
-              <a:rPr b="1" sz="1500">
+              <a:rPr sz="1500" b="1">
                 <a:solidFill>
                   <a:srgbClr val="215E98"/>
                 </a:solidFill>
@@ -5022,6 +5045,7 @@
           <a:lstStyle/>
           <a:p>
             <a:pPr algn="ctr"/>
+            <a:endParaRPr/>
           </a:p>
         </p:txBody>
       </p:sp>
@@ -5049,7 +5073,7 @@
           <a:p>
             <a:pPr algn="l"/>
             <a:r>
-              <a:rPr b="1" sz="1500">
+              <a:rPr sz="1500" b="1">
                 <a:solidFill>
                   <a:srgbClr val="F3A334"/>
                 </a:solidFill>
@@ -5156,7 +5180,7 @@
 </file>
 
 <file path=ppt/slides/slide4.xml><?xml version="1.0" encoding="utf-8"?>
-<p:sld xmlns:a="http://schemas.openxmlformats.org/drawingml/2006/main" xmlns:p="http://schemas.openxmlformats.org/presentationml/2006/main" xmlns:r="http://schemas.openxmlformats.org/officeDocument/2006/relationships">
+<p:sld xmlns:a="http://schemas.openxmlformats.org/drawingml/2006/main" xmlns:r="http://schemas.openxmlformats.org/officeDocument/2006/relationships" xmlns:p="http://schemas.openxmlformats.org/presentationml/2006/main">
   <p:cSld>
     <p:bg>
       <p:bgPr>
@@ -5172,7 +5196,14 @@
         <p:cNvGrpSpPr/>
         <p:nvPr/>
       </p:nvGrpSpPr>
-      <p:grpSpPr/>
+      <p:grpSpPr>
+        <a:xfrm>
+          <a:off x="0" y="0"/>
+          <a:ext cx="0" cy="0"/>
+          <a:chOff x="0" y="0"/>
+          <a:chExt cx="0" cy="0"/>
+        </a:xfrm>
+      </p:grpSpPr>
       <p:sp>
         <p:nvSpPr>
           <p:cNvPr id="2" name="TextBox 1"/>
@@ -5252,7 +5283,7 @@
         <p:spPr>
           <a:xfrm>
             <a:off x="685800" y="1645920"/>
-            <a:ext cx="2468880" cy="2286000"/>
+            <a:ext cx="2598576" cy="2286000"/>
           </a:xfrm>
           <a:prstGeom prst="roundRect">
             <a:avLst/>
@@ -5285,6 +5316,7 @@
           <a:lstStyle/>
           <a:p>
             <a:pPr algn="ctr"/>
+            <a:endParaRPr/>
           </a:p>
         </p:txBody>
       </p:sp>
@@ -5297,7 +5329,7 @@
         <p:spPr>
           <a:xfrm>
             <a:off x="868680" y="1755648"/>
-            <a:ext cx="2103120" cy="274320"/>
+            <a:ext cx="2492734" cy="323165"/>
           </a:xfrm>
           <a:prstGeom prst="rect">
             <a:avLst/>
@@ -5312,10 +5344,7 @@
           <a:p>
             <a:pPr algn="l"/>
             <a:r>
-              <a:rPr b="1" sz="1500">
-                <a:solidFill>
-                  <a:srgbClr val="D9EFE4"/>
-                </a:solidFill>
+              <a:rPr sz="1500" b="1" dirty="0">
                 <a:latin typeface="Aptos"/>
               </a:rPr>
               <a:t>Weather-derived features</a:t>
@@ -5351,7 +5380,7 @@
               </a:spcAft>
             </a:pPr>
             <a:r>
-              <a:rPr sz="1100">
+              <a:rPr sz="1100" dirty="0">
                 <a:solidFill>
                   <a:srgbClr val="212121"/>
                 </a:solidFill>
@@ -5367,7 +5396,7 @@
               </a:spcAft>
             </a:pPr>
             <a:r>
-              <a:rPr sz="1100">
+              <a:rPr sz="1100" dirty="0">
                 <a:solidFill>
                   <a:srgbClr val="212121"/>
                 </a:solidFill>
@@ -5383,7 +5412,7 @@
               </a:spcAft>
             </a:pPr>
             <a:r>
-              <a:rPr sz="1100">
+              <a:rPr sz="1100" dirty="0">
                 <a:solidFill>
                   <a:srgbClr val="212121"/>
                 </a:solidFill>
@@ -5399,7 +5428,7 @@
               </a:spcAft>
             </a:pPr>
             <a:r>
-              <a:rPr sz="1100">
+              <a:rPr sz="1100" dirty="0">
                 <a:solidFill>
                   <a:srgbClr val="212121"/>
                 </a:solidFill>
@@ -5452,6 +5481,7 @@
           <a:lstStyle/>
           <a:p>
             <a:pPr algn="ctr"/>
+            <a:endParaRPr/>
           </a:p>
         </p:txBody>
       </p:sp>
@@ -5464,7 +5494,7 @@
         <p:spPr>
           <a:xfrm>
             <a:off x="3611880" y="1755648"/>
-            <a:ext cx="2103120" cy="274320"/>
+            <a:ext cx="2002471" cy="323165"/>
           </a:xfrm>
           <a:prstGeom prst="rect">
             <a:avLst/>
@@ -5479,10 +5509,7 @@
           <a:p>
             <a:pPr algn="l"/>
             <a:r>
-              <a:rPr b="1" sz="1500">
-                <a:solidFill>
-                  <a:srgbClr val="D9EFE4"/>
-                </a:solidFill>
+              <a:rPr sz="1500" b="1" dirty="0">
                 <a:latin typeface="Aptos"/>
               </a:rPr>
               <a:t>Agronomic features</a:t>
@@ -5518,7 +5545,7 @@
               </a:spcAft>
             </a:pPr>
             <a:r>
-              <a:rPr sz="1100">
+              <a:rPr sz="1100" dirty="0">
                 <a:solidFill>
                   <a:srgbClr val="212121"/>
                 </a:solidFill>
@@ -5534,7 +5561,7 @@
               </a:spcAft>
             </a:pPr>
             <a:r>
-              <a:rPr sz="1100">
+              <a:rPr sz="1100" dirty="0">
                 <a:solidFill>
                   <a:srgbClr val="212121"/>
                 </a:solidFill>
@@ -5550,7 +5577,7 @@
               </a:spcAft>
             </a:pPr>
             <a:r>
-              <a:rPr sz="1100">
+              <a:rPr sz="1100" dirty="0">
                 <a:solidFill>
                   <a:srgbClr val="212121"/>
                 </a:solidFill>
@@ -5566,7 +5593,7 @@
               </a:spcAft>
             </a:pPr>
             <a:r>
-              <a:rPr sz="1100">
+              <a:rPr sz="1100" dirty="0">
                 <a:solidFill>
                   <a:srgbClr val="212121"/>
                 </a:solidFill>
@@ -5619,6 +5646,7 @@
           <a:lstStyle/>
           <a:p>
             <a:pPr algn="ctr"/>
+            <a:endParaRPr/>
           </a:p>
         </p:txBody>
       </p:sp>
@@ -5631,7 +5659,7 @@
         <p:spPr>
           <a:xfrm>
             <a:off x="6355080" y="1755648"/>
-            <a:ext cx="2103120" cy="274320"/>
+            <a:ext cx="2008883" cy="323165"/>
           </a:xfrm>
           <a:prstGeom prst="rect">
             <a:avLst/>
@@ -5646,10 +5674,7 @@
           <a:p>
             <a:pPr algn="l"/>
             <a:r>
-              <a:rPr b="1" sz="1500">
-                <a:solidFill>
-                  <a:srgbClr val="D9EFE4"/>
-                </a:solidFill>
+              <a:rPr sz="1500" b="1" dirty="0">
                 <a:latin typeface="Aptos"/>
               </a:rPr>
               <a:t>Modeling guardrails</a:t>
@@ -5685,7 +5710,7 @@
               </a:spcAft>
             </a:pPr>
             <a:r>
-              <a:rPr sz="1100">
+              <a:rPr sz="1100" dirty="0">
                 <a:solidFill>
                   <a:srgbClr val="212121"/>
                 </a:solidFill>
@@ -5701,7 +5726,7 @@
               </a:spcAft>
             </a:pPr>
             <a:r>
-              <a:rPr sz="1100">
+              <a:rPr sz="1100" dirty="0">
                 <a:solidFill>
                   <a:srgbClr val="212121"/>
                 </a:solidFill>
@@ -5717,7 +5742,7 @@
               </a:spcAft>
             </a:pPr>
             <a:r>
-              <a:rPr sz="1100">
+              <a:rPr sz="1100" dirty="0">
                 <a:solidFill>
                   <a:srgbClr val="212121"/>
                 </a:solidFill>
@@ -5733,7 +5758,7 @@
               </a:spcAft>
             </a:pPr>
             <a:r>
-              <a:rPr sz="1100">
+              <a:rPr sz="1100" dirty="0">
                 <a:solidFill>
                   <a:srgbClr val="212121"/>
                 </a:solidFill>
@@ -5786,6 +5811,7 @@
           <a:lstStyle/>
           <a:p>
             <a:pPr algn="ctr"/>
+            <a:endParaRPr/>
           </a:p>
         </p:txBody>
       </p:sp>
@@ -5813,7 +5839,7 @@
           <a:p>
             <a:pPr algn="l"/>
             <a:r>
-              <a:rPr b="1" sz="1500">
+              <a:rPr sz="1500" b="1">
                 <a:solidFill>
                   <a:srgbClr val="F3A334"/>
                 </a:solidFill>
@@ -5920,7 +5946,7 @@
 </file>
 
 <file path=ppt/slides/slide5.xml><?xml version="1.0" encoding="utf-8"?>
-<p:sld xmlns:a="http://schemas.openxmlformats.org/drawingml/2006/main" xmlns:p="http://schemas.openxmlformats.org/presentationml/2006/main" xmlns:r="http://schemas.openxmlformats.org/officeDocument/2006/relationships">
+<p:sld xmlns:a="http://schemas.openxmlformats.org/drawingml/2006/main" xmlns:r="http://schemas.openxmlformats.org/officeDocument/2006/relationships" xmlns:p="http://schemas.openxmlformats.org/presentationml/2006/main">
   <p:cSld>
     <p:bg>
       <p:bgPr>
@@ -5936,7 +5962,14 @@
         <p:cNvGrpSpPr/>
         <p:nvPr/>
       </p:nvGrpSpPr>
-      <p:grpSpPr/>
+      <p:grpSpPr>
+        <a:xfrm>
+          <a:off x="0" y="0"/>
+          <a:ext cx="0" cy="0"/>
+          <a:chOff x="0" y="0"/>
+          <a:chExt cx="0" cy="0"/>
+        </a:xfrm>
+      </p:grpSpPr>
       <p:sp>
         <p:nvSpPr>
           <p:cNvPr id="2" name="TextBox 1"/>
@@ -5946,7 +5979,7 @@
         <p:spPr>
           <a:xfrm>
             <a:off x="594360" y="411480"/>
-            <a:ext cx="8686800" cy="731520"/>
+            <a:ext cx="8686800" cy="492443"/>
           </a:xfrm>
           <a:prstGeom prst="rect">
             <a:avLst/>
@@ -5961,10 +5994,7 @@
           <a:p>
             <a:pPr algn="l"/>
             <a:r>
-              <a:rPr sz="2600" b="1">
-                <a:solidFill>
-                  <a:srgbClr val="FFFFFF"/>
-                </a:solidFill>
+              <a:rPr sz="2600" b="1" dirty="0">
                 <a:latin typeface="Aptos"/>
               </a:rPr>
               <a:t>Modeling and validation</a:t>
@@ -5981,7 +6011,7 @@
         <p:spPr>
           <a:xfrm>
             <a:off x="621792" y="987552"/>
-            <a:ext cx="7772400" cy="457200"/>
+            <a:ext cx="4639412" cy="261610"/>
           </a:xfrm>
           <a:prstGeom prst="rect">
             <a:avLst/>
@@ -5996,10 +6026,7 @@
           <a:p>
             <a:pPr algn="l"/>
             <a:r>
-              <a:rPr sz="1100">
-                <a:solidFill>
-                  <a:srgbClr val="FFFFFF"/>
-                </a:solidFill>
+              <a:rPr sz="1100" dirty="0">
                 <a:latin typeface="Aptos"/>
               </a:rPr>
               <a:t>Comparing baseline and predictive models on a held-out validation split</a:t>
@@ -6049,6 +6076,7 @@
           <a:lstStyle/>
           <a:p>
             <a:pPr algn="ctr"/>
+            <a:endParaRPr/>
           </a:p>
         </p:txBody>
       </p:sp>
@@ -6094,6 +6122,7 @@
           <a:lstStyle/>
           <a:p>
             <a:pPr algn="ctr"/>
+            <a:endParaRPr/>
           </a:p>
         </p:txBody>
       </p:sp>
@@ -6121,7 +6150,7 @@
           <a:p>
             <a:pPr algn="ctr"/>
             <a:r>
-              <a:rPr b="1" sz="1200">
+              <a:rPr sz="1200" b="1">
                 <a:solidFill>
                   <a:srgbClr val="FFFFFF"/>
                 </a:solidFill>
@@ -6173,6 +6202,7 @@
           <a:lstStyle/>
           <a:p>
             <a:pPr algn="ctr"/>
+            <a:endParaRPr/>
           </a:p>
         </p:txBody>
       </p:sp>
@@ -6200,7 +6230,7 @@
           <a:p>
             <a:pPr algn="ctr"/>
             <a:r>
-              <a:rPr b="1" sz="1200">
+              <a:rPr sz="1200" b="1">
                 <a:solidFill>
                   <a:srgbClr val="FFFFFF"/>
                 </a:solidFill>
@@ -6252,6 +6282,7 @@
           <a:lstStyle/>
           <a:p>
             <a:pPr algn="ctr"/>
+            <a:endParaRPr/>
           </a:p>
         </p:txBody>
       </p:sp>
@@ -6279,7 +6310,7 @@
           <a:p>
             <a:pPr algn="ctr"/>
             <a:r>
-              <a:rPr b="1" sz="1200">
+              <a:rPr sz="1200" b="1">
                 <a:solidFill>
                   <a:srgbClr val="FFFFFF"/>
                 </a:solidFill>
@@ -6331,6 +6362,7 @@
           <a:lstStyle/>
           <a:p>
             <a:pPr algn="ctr"/>
+            <a:endParaRPr/>
           </a:p>
         </p:txBody>
       </p:sp>
@@ -6358,7 +6390,7 @@
           <a:p>
             <a:pPr algn="ctr"/>
             <a:r>
-              <a:rPr b="1" sz="1200">
+              <a:rPr sz="1200" b="1">
                 <a:solidFill>
                   <a:srgbClr val="FFFFFF"/>
                 </a:solidFill>
@@ -6410,6 +6442,7 @@
           <a:lstStyle/>
           <a:p>
             <a:pPr algn="ctr"/>
+            <a:endParaRPr/>
           </a:p>
         </p:txBody>
       </p:sp>
@@ -6489,6 +6522,7 @@
           <a:lstStyle/>
           <a:p>
             <a:pPr algn="ctr"/>
+            <a:endParaRPr/>
           </a:p>
         </p:txBody>
       </p:sp>
@@ -6568,6 +6602,7 @@
           <a:lstStyle/>
           <a:p>
             <a:pPr algn="ctr"/>
+            <a:endParaRPr/>
           </a:p>
         </p:txBody>
       </p:sp>
@@ -6647,6 +6682,7 @@
           <a:lstStyle/>
           <a:p>
             <a:pPr algn="ctr"/>
+            <a:endParaRPr/>
           </a:p>
         </p:txBody>
       </p:sp>
@@ -6726,6 +6762,7 @@
           <a:lstStyle/>
           <a:p>
             <a:pPr algn="ctr"/>
+            <a:endParaRPr/>
           </a:p>
         </p:txBody>
       </p:sp>
@@ -6805,6 +6842,7 @@
           <a:lstStyle/>
           <a:p>
             <a:pPr algn="ctr"/>
+            <a:endParaRPr/>
           </a:p>
         </p:txBody>
       </p:sp>
@@ -6884,6 +6922,7 @@
           <a:lstStyle/>
           <a:p>
             <a:pPr algn="ctr"/>
+            <a:endParaRPr/>
           </a:p>
         </p:txBody>
       </p:sp>
@@ -6963,6 +7002,7 @@
           <a:lstStyle/>
           <a:p>
             <a:pPr algn="ctr"/>
+            <a:endParaRPr/>
           </a:p>
         </p:txBody>
       </p:sp>
@@ -7042,6 +7082,7 @@
           <a:lstStyle/>
           <a:p>
             <a:pPr algn="ctr"/>
+            <a:endParaRPr/>
           </a:p>
         </p:txBody>
       </p:sp>
@@ -7121,6 +7162,7 @@
           <a:lstStyle/>
           <a:p>
             <a:pPr algn="ctr"/>
+            <a:endParaRPr/>
           </a:p>
         </p:txBody>
       </p:sp>
@@ -7200,6 +7242,7 @@
           <a:lstStyle/>
           <a:p>
             <a:pPr algn="ctr"/>
+            <a:endParaRPr/>
           </a:p>
         </p:txBody>
       </p:sp>
@@ -7279,6 +7322,7 @@
           <a:lstStyle/>
           <a:p>
             <a:pPr algn="ctr"/>
+            <a:endParaRPr/>
           </a:p>
         </p:txBody>
       </p:sp>
@@ -7358,6 +7402,7 @@
           <a:lstStyle/>
           <a:p>
             <a:pPr algn="ctr"/>
+            <a:endParaRPr/>
           </a:p>
         </p:txBody>
       </p:sp>
@@ -7385,7 +7430,7 @@
           <a:p>
             <a:pPr algn="l"/>
             <a:r>
-              <a:rPr b="1" sz="1500">
+              <a:rPr sz="1500" b="1">
                 <a:solidFill>
                   <a:srgbClr val="2E7D5C"/>
                 </a:solidFill>
@@ -7492,7 +7537,7 @@
 </file>
 
 <file path=ppt/slides/slide6.xml><?xml version="1.0" encoding="utf-8"?>
-<p:sld xmlns:a="http://schemas.openxmlformats.org/drawingml/2006/main" xmlns:p="http://schemas.openxmlformats.org/presentationml/2006/main" xmlns:r="http://schemas.openxmlformats.org/officeDocument/2006/relationships">
+<p:sld xmlns:a="http://schemas.openxmlformats.org/drawingml/2006/main" xmlns:r="http://schemas.openxmlformats.org/officeDocument/2006/relationships" xmlns:p="http://schemas.openxmlformats.org/presentationml/2006/main">
   <p:cSld>
     <p:bg>
       <p:bgPr>
@@ -7508,7 +7553,14 @@
         <p:cNvGrpSpPr/>
         <p:nvPr/>
       </p:nvGrpSpPr>
-      <p:grpSpPr/>
+      <p:grpSpPr>
+        <a:xfrm>
+          <a:off x="0" y="0"/>
+          <a:ext cx="0" cy="0"/>
+          <a:chOff x="0" y="0"/>
+          <a:chExt cx="0" cy="0"/>
+        </a:xfrm>
+      </p:grpSpPr>
       <p:sp>
         <p:nvSpPr>
           <p:cNvPr id="2" name="TextBox 1"/>
@@ -7621,6 +7673,7 @@
           <a:lstStyle/>
           <a:p>
             <a:pPr algn="ctr"/>
+            <a:endParaRPr/>
           </a:p>
         </p:txBody>
       </p:sp>
@@ -7736,6 +7789,7 @@
           <a:lstStyle/>
           <a:p>
             <a:pPr algn="ctr"/>
+            <a:endParaRPr/>
           </a:p>
         </p:txBody>
       </p:sp>
@@ -7851,6 +7905,7 @@
           <a:lstStyle/>
           <a:p>
             <a:pPr algn="ctr"/>
+            <a:endParaRPr/>
           </a:p>
         </p:txBody>
       </p:sp>
@@ -7966,6 +8021,7 @@
           <a:lstStyle/>
           <a:p>
             <a:pPr algn="ctr"/>
+            <a:endParaRPr/>
           </a:p>
         </p:txBody>
       </p:sp>
@@ -7978,7 +8034,7 @@
         <p:spPr>
           <a:xfrm>
             <a:off x="8046720" y="1755648"/>
-            <a:ext cx="3291840" cy="274320"/>
+            <a:ext cx="1797287" cy="323165"/>
           </a:xfrm>
           <a:prstGeom prst="rect">
             <a:avLst/>
@@ -7993,10 +8049,7 @@
           <a:p>
             <a:pPr algn="l"/>
             <a:r>
-              <a:rPr b="1" sz="1500">
-                <a:solidFill>
-                  <a:srgbClr val="FFFFFF"/>
-                </a:solidFill>
+              <a:rPr sz="1500" b="1" dirty="0">
                 <a:latin typeface="Aptos"/>
               </a:rPr>
               <a:t>Operational value</a:t>
@@ -8100,7 +8153,7 @@
 </file>
 
 <file path=ppt/slides/slide7.xml><?xml version="1.0" encoding="utf-8"?>
-<p:sld xmlns:a="http://schemas.openxmlformats.org/drawingml/2006/main" xmlns:p="http://schemas.openxmlformats.org/presentationml/2006/main" xmlns:r="http://schemas.openxmlformats.org/officeDocument/2006/relationships">
+<p:sld xmlns:a="http://schemas.openxmlformats.org/drawingml/2006/main" xmlns:r="http://schemas.openxmlformats.org/officeDocument/2006/relationships" xmlns:p="http://schemas.openxmlformats.org/presentationml/2006/main">
   <p:cSld>
     <p:bg>
       <p:bgPr>
@@ -8116,7 +8169,14 @@
         <p:cNvGrpSpPr/>
         <p:nvPr/>
       </p:nvGrpSpPr>
-      <p:grpSpPr/>
+      <p:grpSpPr>
+        <a:xfrm>
+          <a:off x="0" y="0"/>
+          <a:ext cx="0" cy="0"/>
+          <a:chOff x="0" y="0"/>
+          <a:chExt cx="0" cy="0"/>
+        </a:xfrm>
+      </p:grpSpPr>
       <p:sp>
         <p:nvSpPr>
           <p:cNvPr id="2" name="TextBox 1"/>
@@ -8126,7 +8186,7 @@
         <p:spPr>
           <a:xfrm>
             <a:off x="594360" y="411480"/>
-            <a:ext cx="8686800" cy="731520"/>
+            <a:ext cx="8686800" cy="492443"/>
           </a:xfrm>
           <a:prstGeom prst="rect">
             <a:avLst/>
@@ -8141,10 +8201,7 @@
           <a:p>
             <a:pPr algn="l"/>
             <a:r>
-              <a:rPr sz="2600" b="1">
-                <a:solidFill>
-                  <a:srgbClr val="FFFFFF"/>
-                </a:solidFill>
+              <a:rPr sz="2600" b="1" dirty="0">
                 <a:latin typeface="Aptos"/>
               </a:rPr>
               <a:t>Next steps</a:t>
@@ -8161,7 +8218,7 @@
         <p:spPr>
           <a:xfrm>
             <a:off x="621792" y="987552"/>
-            <a:ext cx="7772400" cy="457200"/>
+            <a:ext cx="3687228" cy="261610"/>
           </a:xfrm>
           <a:prstGeom prst="rect">
             <a:avLst/>
@@ -8176,10 +8233,7 @@
           <a:p>
             <a:pPr algn="l"/>
             <a:r>
-              <a:rPr sz="1100">
-                <a:solidFill>
-                  <a:srgbClr val="FFFFFF"/>
-                </a:solidFill>
+              <a:rPr sz="1100" dirty="0">
                 <a:latin typeface="Aptos"/>
               </a:rPr>
               <a:t>Maintain momentum with a stronger operational pipeline</a:t>
@@ -8229,6 +8283,7 @@
           <a:lstStyle/>
           <a:p>
             <a:pPr algn="ctr"/>
+            <a:endParaRPr/>
           </a:p>
         </p:txBody>
       </p:sp>
@@ -8256,7 +8311,7 @@
           <a:p>
             <a:pPr algn="l"/>
             <a:r>
-              <a:rPr b="1" sz="1500">
+              <a:rPr sz="1500" b="1">
                 <a:solidFill>
                   <a:srgbClr val="2E7D5C"/>
                 </a:solidFill>
@@ -8380,6 +8435,7 @@
           <a:lstStyle/>
           <a:p>
             <a:pPr algn="ctr"/>
+            <a:endParaRPr/>
           </a:p>
         </p:txBody>
       </p:sp>
@@ -8407,7 +8463,7 @@
           <a:p>
             <a:pPr algn="l"/>
             <a:r>
-              <a:rPr b="1" sz="1500">
+              <a:rPr sz="1500" b="1">
                 <a:solidFill>
                   <a:srgbClr val="215E98"/>
                 </a:solidFill>
@@ -8531,6 +8587,7 @@
           <a:lstStyle/>
           <a:p>
             <a:pPr algn="ctr"/>
+            <a:endParaRPr/>
           </a:p>
         </p:txBody>
       </p:sp>
@@ -8558,7 +8615,7 @@
           <a:p>
             <a:pPr algn="l"/>
             <a:r>
-              <a:rPr b="1" sz="1500">
+              <a:rPr sz="1500" b="1">
                 <a:solidFill>
                   <a:srgbClr val="F3A334"/>
                 </a:solidFill>

--- a/presentation/team_11_presentation.pptx
+++ b/presentation/team_11_presentation.pptx
@@ -3239,7 +3239,7 @@
         </p:nvSpPr>
         <p:spPr>
           <a:xfrm>
-            <a:off x="731520" y="1188720"/>
+            <a:off x="731520" y="612648"/>
             <a:ext cx="7132320" cy="1828800"/>
           </a:xfrm>
           <a:prstGeom prst="rect">
@@ -3255,7 +3255,7 @@
           <a:p>
             <a:pPr algn="l"/>
             <a:r>
-              <a:rPr sz="3000" b="1">
+              <a:rPr sz="3000" b="1" dirty="0">
                 <a:solidFill>
                   <a:srgbClr val="FFFFFF"/>
                 </a:solidFill>
@@ -3267,7 +3267,7 @@
           <a:p>
             <a:pPr algn="l"/>
             <a:r>
-              <a:rPr sz="3000" b="1">
+              <a:rPr sz="3000" b="1" dirty="0">
                 <a:solidFill>
                   <a:srgbClr val="D9EFE4"/>
                 </a:solidFill>
@@ -3286,7 +3286,7 @@
         </p:nvSpPr>
         <p:spPr>
           <a:xfrm>
-            <a:off x="731520" y="2926080"/>
+            <a:off x="731520" y="2286000"/>
             <a:ext cx="6035040" cy="914400"/>
           </a:xfrm>
           <a:prstGeom prst="rect">
@@ -3302,7 +3302,7 @@
           <a:p>
             <a:pPr algn="l"/>
             <a:r>
-              <a:rPr sz="1800">
+              <a:rPr sz="1800" dirty="0">
                 <a:solidFill>
                   <a:srgbClr val="FFFFFF"/>
                 </a:solidFill>
@@ -3321,7 +3321,7 @@
         </p:nvSpPr>
         <p:spPr>
           <a:xfrm>
-            <a:off x="731520" y="4297680"/>
+            <a:off x="685800" y="3402408"/>
             <a:ext cx="2286000" cy="640080"/>
           </a:xfrm>
           <a:prstGeom prst="roundRect">
@@ -3367,7 +3367,7 @@
         </p:nvSpPr>
         <p:spPr>
           <a:xfrm>
-            <a:off x="914400" y="4480560"/>
+            <a:off x="914400" y="3611880"/>
             <a:ext cx="1828800" cy="320040"/>
           </a:xfrm>
           <a:prstGeom prst="rect">
@@ -3383,7 +3383,7 @@
           <a:p>
             <a:pPr algn="ctr"/>
             <a:r>
-              <a:rPr sz="1200" b="1">
+              <a:rPr sz="1200" b="1" dirty="0">
                 <a:solidFill>
                   <a:srgbClr val="2E7D5C"/>
                 </a:solidFill>
@@ -3401,7 +3401,7 @@
         </p:nvSpPr>
         <p:spPr>
           <a:xfrm>
-            <a:off x="3291840" y="4297680"/>
+            <a:off x="3291840" y="3406140"/>
             <a:ext cx="2560320" cy="640080"/>
           </a:xfrm>
           <a:prstGeom prst="roundRect">
@@ -3447,7 +3447,7 @@
         </p:nvSpPr>
         <p:spPr>
           <a:xfrm>
-            <a:off x="3474720" y="4480560"/>
+            <a:off x="3566160" y="3520440"/>
             <a:ext cx="2011680" cy="320040"/>
           </a:xfrm>
           <a:prstGeom prst="rect">
@@ -3481,7 +3481,7 @@
         </p:nvSpPr>
         <p:spPr>
           <a:xfrm>
-            <a:off x="6217920" y="4297680"/>
+            <a:off x="6133944" y="3402408"/>
             <a:ext cx="2194560" cy="640080"/>
           </a:xfrm>
           <a:prstGeom prst="roundRect">
@@ -3527,7 +3527,7 @@
         </p:nvSpPr>
         <p:spPr>
           <a:xfrm>
-            <a:off x="6400800" y="4480560"/>
+            <a:off x="6316824" y="3566160"/>
             <a:ext cx="1828800" cy="320040"/>
           </a:xfrm>
           <a:prstGeom prst="rect">
@@ -3543,7 +3543,7 @@
           <a:p>
             <a:pPr algn="ctr"/>
             <a:r>
-              <a:rPr sz="1200" b="1">
+              <a:rPr sz="1200" b="1" dirty="0">
                 <a:solidFill>
                   <a:srgbClr val="2E7D5C"/>
                 </a:solidFill>
@@ -3966,6 +3966,302 @@
               </a:rPr>
               <a:t>0.3950</a:t>
             </a:r>
+          </a:p>
+        </p:txBody>
+      </p:sp>
+      <p:sp>
+        <p:nvSpPr>
+          <p:cNvPr id="24" name="TextBox 23"/>
+          <p:cNvSpPr txBox="1"/>
+          <p:nvPr/>
+        </p:nvSpPr>
+        <p:spPr>
+          <a:xfrm>
+            <a:off x="459065" y="4627829"/>
+            <a:ext cx="4766077" cy="2123658"/>
+          </a:xfrm>
+          <a:prstGeom prst="rect">
+            <a:avLst/>
+          </a:prstGeom>
+          <a:noFill/>
+        </p:spPr>
+        <p:txBody>
+          <a:bodyPr wrap="square">
+            <a:spAutoFit/>
+          </a:bodyPr>
+          <a:lstStyle/>
+          <a:p>
+            <a:r>
+              <a:rPr lang="en-US" sz="1200" b="1" dirty="0" smtClean="0">
+                <a:solidFill>
+                  <a:schemeClr val="bg1">
+                    <a:lumMod val="95000"/>
+                  </a:schemeClr>
+                </a:solidFill>
+              </a:rPr>
+              <a:t>Group </a:t>
+            </a:r>
+            <a:r>
+              <a:rPr lang="en-US" sz="1200" b="1" dirty="0">
+                <a:solidFill>
+                  <a:schemeClr val="bg1">
+                    <a:lumMod val="95000"/>
+                  </a:schemeClr>
+                </a:solidFill>
+              </a:rPr>
+              <a:t>Members</a:t>
+            </a:r>
+            <a:endParaRPr lang="en-US" sz="1200" dirty="0">
+              <a:solidFill>
+                <a:schemeClr val="bg1">
+                  <a:lumMod val="95000"/>
+                </a:schemeClr>
+              </a:solidFill>
+            </a:endParaRPr>
+          </a:p>
+          <a:p>
+            <a:pPr marL="228600" indent="-228600">
+              <a:lnSpc>
+                <a:spcPct val="200000"/>
+              </a:lnSpc>
+              <a:buFont typeface="+mj-lt"/>
+              <a:buAutoNum type="arabicPeriod"/>
+            </a:pPr>
+            <a:r>
+              <a:rPr lang="en-US" sz="1200" b="1" dirty="0" err="1" smtClean="0">
+                <a:solidFill>
+                  <a:schemeClr val="bg1">
+                    <a:lumMod val="95000"/>
+                  </a:schemeClr>
+                </a:solidFill>
+              </a:rPr>
+              <a:t>Oli</a:t>
+            </a:r>
+            <a:r>
+              <a:rPr lang="en-US" sz="1200" b="1" dirty="0" smtClean="0">
+                <a:solidFill>
+                  <a:schemeClr val="bg1">
+                    <a:lumMod val="95000"/>
+                  </a:schemeClr>
+                </a:solidFill>
+              </a:rPr>
+              <a:t> </a:t>
+            </a:r>
+            <a:r>
+              <a:rPr lang="en-US" sz="1200" b="1" dirty="0" err="1">
+                <a:solidFill>
+                  <a:schemeClr val="bg1">
+                    <a:lumMod val="95000"/>
+                  </a:schemeClr>
+                </a:solidFill>
+              </a:rPr>
+              <a:t>Bakala</a:t>
+            </a:r>
+            <a:r>
+              <a:rPr lang="en-US" sz="1200" b="1" dirty="0">
+                <a:solidFill>
+                  <a:schemeClr val="bg1">
+                    <a:lumMod val="95000"/>
+                  </a:schemeClr>
+                </a:solidFill>
+              </a:rPr>
+              <a:t> </a:t>
+            </a:r>
+            <a:r>
+              <a:rPr lang="en-US" sz="1200" b="1" dirty="0" err="1">
+                <a:solidFill>
+                  <a:schemeClr val="bg1">
+                    <a:lumMod val="95000"/>
+                  </a:schemeClr>
+                </a:solidFill>
+              </a:rPr>
+              <a:t>Beyena</a:t>
+            </a:r>
+            <a:r>
+              <a:rPr lang="en-US" sz="1200" b="1" dirty="0">
+                <a:solidFill>
+                  <a:schemeClr val="bg1">
+                    <a:lumMod val="95000"/>
+                  </a:schemeClr>
+                </a:solidFill>
+              </a:rPr>
+              <a:t>, qiyas-2026-005295, Olibekele50@gmail.com</a:t>
+            </a:r>
+          </a:p>
+          <a:p>
+            <a:pPr marL="228600" indent="-228600">
+              <a:lnSpc>
+                <a:spcPct val="200000"/>
+              </a:lnSpc>
+              <a:buFont typeface="+mj-lt"/>
+              <a:buAutoNum type="arabicPeriod"/>
+            </a:pPr>
+            <a:r>
+              <a:rPr lang="en-US" sz="1200" b="1" dirty="0" err="1" smtClean="0">
+                <a:solidFill>
+                  <a:schemeClr val="bg1">
+                    <a:lumMod val="95000"/>
+                  </a:schemeClr>
+                </a:solidFill>
+              </a:rPr>
+              <a:t>Bereket</a:t>
+            </a:r>
+            <a:r>
+              <a:rPr lang="en-US" sz="1200" b="1" dirty="0" smtClean="0">
+                <a:solidFill>
+                  <a:schemeClr val="bg1">
+                    <a:lumMod val="95000"/>
+                  </a:schemeClr>
+                </a:solidFill>
+              </a:rPr>
+              <a:t> </a:t>
+            </a:r>
+            <a:r>
+              <a:rPr lang="en-US" sz="1200" b="1" dirty="0">
+                <a:solidFill>
+                  <a:schemeClr val="bg1">
+                    <a:lumMod val="95000"/>
+                  </a:schemeClr>
+                </a:solidFill>
+              </a:rPr>
+              <a:t>G/</a:t>
+            </a:r>
+            <a:r>
+              <a:rPr lang="en-US" sz="1200" b="1" dirty="0" err="1">
+                <a:solidFill>
+                  <a:schemeClr val="bg1">
+                    <a:lumMod val="95000"/>
+                  </a:schemeClr>
+                </a:solidFill>
+              </a:rPr>
+              <a:t>Alif</a:t>
+            </a:r>
+            <a:r>
+              <a:rPr lang="en-US" sz="1200" b="1" dirty="0">
+                <a:solidFill>
+                  <a:schemeClr val="bg1">
+                    <a:lumMod val="95000"/>
+                  </a:schemeClr>
+                </a:solidFill>
+              </a:rPr>
+              <a:t>, qiyas-2026-004845,  bereketgalif21@gmail.com</a:t>
+            </a:r>
+          </a:p>
+          <a:p>
+            <a:pPr marL="228600" indent="-228600">
+              <a:lnSpc>
+                <a:spcPct val="200000"/>
+              </a:lnSpc>
+              <a:buFont typeface="+mj-lt"/>
+              <a:buAutoNum type="arabicPeriod"/>
+            </a:pPr>
+            <a:r>
+              <a:rPr lang="en-US" sz="1200" b="1" dirty="0" err="1" smtClean="0">
+                <a:solidFill>
+                  <a:schemeClr val="bg1">
+                    <a:lumMod val="95000"/>
+                  </a:schemeClr>
+                </a:solidFill>
+              </a:rPr>
+              <a:t>Ermiyas</a:t>
+            </a:r>
+            <a:r>
+              <a:rPr lang="en-US" sz="1200" b="1" dirty="0" smtClean="0">
+                <a:solidFill>
+                  <a:schemeClr val="bg1">
+                    <a:lumMod val="95000"/>
+                  </a:schemeClr>
+                </a:solidFill>
+              </a:rPr>
+              <a:t> </a:t>
+            </a:r>
+            <a:r>
+              <a:rPr lang="en-US" sz="1200" b="1" dirty="0" err="1">
+                <a:solidFill>
+                  <a:schemeClr val="bg1">
+                    <a:lumMod val="95000"/>
+                  </a:schemeClr>
+                </a:solidFill>
+              </a:rPr>
+              <a:t>Zewdu</a:t>
+            </a:r>
+            <a:r>
+              <a:rPr lang="en-US" sz="1200" b="1" dirty="0">
+                <a:solidFill>
+                  <a:schemeClr val="bg1">
+                    <a:lumMod val="95000"/>
+                  </a:schemeClr>
+                </a:solidFill>
+              </a:rPr>
+              <a:t>, qiyas-2026-004085, Ermiyaszewdu266@gmail.com</a:t>
+            </a:r>
+          </a:p>
+          <a:p>
+            <a:pPr marL="228600" indent="-228600">
+              <a:lnSpc>
+                <a:spcPct val="200000"/>
+              </a:lnSpc>
+              <a:buFont typeface="+mj-lt"/>
+              <a:buAutoNum type="arabicPeriod"/>
+            </a:pPr>
+            <a:r>
+              <a:rPr lang="en-US" sz="1200" b="1" dirty="0" smtClean="0">
+                <a:solidFill>
+                  <a:schemeClr val="bg1">
+                    <a:lumMod val="95000"/>
+                  </a:schemeClr>
+                </a:solidFill>
+              </a:rPr>
+              <a:t>Samuel </a:t>
+            </a:r>
+            <a:r>
+              <a:rPr lang="en-US" sz="1200" b="1" dirty="0" err="1">
+                <a:solidFill>
+                  <a:schemeClr val="bg1">
+                    <a:lumMod val="95000"/>
+                  </a:schemeClr>
+                </a:solidFill>
+              </a:rPr>
+              <a:t>Kahsay</a:t>
+            </a:r>
+            <a:r>
+              <a:rPr lang="en-US" sz="1200" b="1" dirty="0">
+                <a:solidFill>
+                  <a:schemeClr val="bg1">
+                    <a:lumMod val="95000"/>
+                  </a:schemeClr>
+                </a:solidFill>
+              </a:rPr>
+              <a:t>, qiyas-2026-001108, Samuelkahsay76@gmail.com</a:t>
+            </a:r>
+          </a:p>
+          <a:p>
+            <a:r>
+              <a:rPr lang="en-US" sz="1200" dirty="0">
+                <a:solidFill>
+                  <a:schemeClr val="bg1">
+                    <a:lumMod val="95000"/>
+                  </a:schemeClr>
+                </a:solidFill>
+              </a:rPr>
+              <a:t/>
+            </a:r>
+            <a:br>
+              <a:rPr lang="en-US" sz="1200" dirty="0">
+                <a:solidFill>
+                  <a:schemeClr val="bg1">
+                    <a:lumMod val="95000"/>
+                  </a:schemeClr>
+                </a:solidFill>
+              </a:rPr>
+            </a:br>
+            <a:endParaRPr lang="en-US" sz="1200" dirty="0">
+              <a:solidFill>
+                <a:schemeClr val="bg1">
+                  <a:lumMod val="95000"/>
+                </a:schemeClr>
+              </a:solidFill>
+            </a:endParaRPr>
           </a:p>
         </p:txBody>
       </p:sp>
